--- a/index/designs/y8-l8/l2-extra-sports/l2-extra-sports.pptx
+++ b/index/designs/y8-l8/l2-extra-sports/l2-extra-sports.pptx
@@ -2748,6 +2748,53 @@
               </a:rPr>
               <a:t>1. Stand in a </a:t>
             </a:r>
+            <a:r>
+              <a:rPr lang="en-US" sz="1050" b="1" dirty="0">
+                <a:solidFill>
+                  <a:srgbClr val="5B6677"/>
+                </a:solidFill>
+                <a:latin typeface="Noto Sans SC" pitchFamily="34" charset="0"/>
+                <a:ea typeface="Noto Sans SC" pitchFamily="34" charset="-122"/>
+                <a:cs typeface="Noto Sans SC" pitchFamily="34" charset="-120"/>
+              </a:rPr>
+              <a:t>circle or row</a:t>
+            </a:r>
+            <a:r>
+              <a:rPr lang="en-US" sz="1050" dirty="0">
+                <a:solidFill>
+                  <a:srgbClr val="5B6677"/>
+                </a:solidFill>
+                <a:latin typeface="Noto Sans SC" pitchFamily="34" charset="0"/>
+                <a:ea typeface="Noto Sans SC" pitchFamily="34" charset="-122"/>
+                <a:cs typeface="Noto Sans SC" pitchFamily="34" charset="-120"/>
+              </a:rPr>
+              <a:t>.</a:t>
+            </a:r>
+            <a:endParaRPr lang="en-US" sz="1050" dirty="0"/>
+          </a:p>
+        </p:txBody>
+      </p:sp>
+      <p:sp>
+        <p:nvSpPr>
+          <p:cNvPr id="15" name="Text 13"/>
+          <p:cNvSpPr/>
+          <p:nvPr/>
+        </p:nvSpPr>
+        <p:spPr>
+          <a:xfrm>
+            <a:off x="634901" y="1957983"/>
+            <a:ext cx="5259425" cy="186630"/>
+          </a:xfrm>
+          <a:prstGeom prst="rect">
+            <a:avLst/>
+          </a:prstGeom>
+          <a:noFill/>
+          <a:ln/>
+        </p:spPr>
+        <p:txBody>
+          <a:bodyPr wrap="square" lIns="0" tIns="0" rIns="0" bIns="0" rtlCol="0" anchor="t"/>
+          <a:lstStyle/>
+          <a:p>
             <a:pPr algn="l" indent="0" marL="0">
               <a:lnSpc>
                 <a:spcPts val="1470"/>
@@ -2758,6 +2805,17 @@
               <a:buNone/>
             </a:pPr>
             <a:r>
+              <a:rPr lang="en-US" sz="1050" dirty="0">
+                <a:solidFill>
+                  <a:srgbClr val="5B6677"/>
+                </a:solidFill>
+                <a:latin typeface="Noto Sans SC" pitchFamily="34" charset="0"/>
+                <a:ea typeface="Noto Sans SC" pitchFamily="34" charset="-122"/>
+                <a:cs typeface="Noto Sans SC" pitchFamily="34" charset="-120"/>
+              </a:rPr>
+              <a:t>2. First student says </a:t>
+            </a:r>
+            <a:r>
               <a:rPr lang="en-US" sz="1050" b="1" dirty="0">
                 <a:solidFill>
                   <a:srgbClr val="5B6677"/>
@@ -2766,8 +2824,44 @@
                 <a:ea typeface="Noto Sans SC" pitchFamily="34" charset="-122"/>
                 <a:cs typeface="Noto Sans SC" pitchFamily="34" charset="-120"/>
               </a:rPr>
-              <a:t>circle or row</a:t>
-            </a:r>
+              <a:t>one sport</a:t>
+            </a:r>
+            <a:r>
+              <a:rPr lang="en-US" sz="1050" dirty="0">
+                <a:solidFill>
+                  <a:srgbClr val="5B6677"/>
+                </a:solidFill>
+                <a:latin typeface="Noto Sans SC" pitchFamily="34" charset="0"/>
+                <a:ea typeface="Noto Sans SC" pitchFamily="34" charset="-122"/>
+                <a:cs typeface="Noto Sans SC" pitchFamily="34" charset="-120"/>
+              </a:rPr>
+              <a:t> in Chinese.</a:t>
+            </a:r>
+            <a:endParaRPr lang="en-US" sz="1050" dirty="0"/>
+          </a:p>
+        </p:txBody>
+      </p:sp>
+      <p:sp>
+        <p:nvSpPr>
+          <p:cNvPr id="16" name="Text 14"/>
+          <p:cNvSpPr/>
+          <p:nvPr/>
+        </p:nvSpPr>
+        <p:spPr>
+          <a:xfrm>
+            <a:off x="634901" y="2208014"/>
+            <a:ext cx="5259425" cy="186630"/>
+          </a:xfrm>
+          <a:prstGeom prst="rect">
+            <a:avLst/>
+          </a:prstGeom>
+          <a:noFill/>
+          <a:ln/>
+        </p:spPr>
+        <p:txBody>
+          <a:bodyPr wrap="square" lIns="0" tIns="0" rIns="0" bIns="0" rtlCol="0" anchor="t"/>
+          <a:lstStyle/>
+          <a:p>
             <a:pPr algn="l" indent="0" marL="0">
               <a:lnSpc>
                 <a:spcPts val="1470"/>
@@ -2786,44 +2880,10 @@
                 <a:ea typeface="Noto Sans SC" pitchFamily="34" charset="-122"/>
                 <a:cs typeface="Noto Sans SC" pitchFamily="34" charset="-120"/>
               </a:rPr>
-              <a:t>.</a:t>
-            </a:r>
-            <a:endParaRPr lang="en-US" sz="1050" dirty="0"/>
-          </a:p>
-        </p:txBody>
-      </p:sp>
-      <p:sp>
-        <p:nvSpPr>
-          <p:cNvPr id="15" name="Text 13"/>
-          <p:cNvSpPr/>
-          <p:nvPr/>
-        </p:nvSpPr>
-        <p:spPr>
-          <a:xfrm>
-            <a:off x="634901" y="1957983"/>
-            <a:ext cx="5259425" cy="186630"/>
-          </a:xfrm>
-          <a:prstGeom prst="rect">
-            <a:avLst/>
-          </a:prstGeom>
-          <a:noFill/>
-          <a:ln/>
-        </p:spPr>
-        <p:txBody>
-          <a:bodyPr wrap="square" lIns="0" tIns="0" rIns="0" bIns="0" rtlCol="0" anchor="t"/>
-          <a:lstStyle/>
-          <a:p>
-            <a:pPr algn="l" indent="0" marL="0">
-              <a:lnSpc>
-                <a:spcPts val="1470"/>
-              </a:lnSpc>
-              <a:spcAft>
-                <a:spcPts val="500"/>
-              </a:spcAft>
-              <a:buNone/>
-            </a:pPr>
-            <a:r>
-              <a:rPr lang="en-US" sz="1050" dirty="0">
+              <a:t>3. Next student </a:t>
+            </a:r>
+            <a:r>
+              <a:rPr lang="en-US" sz="1050" b="1" dirty="0">
                 <a:solidFill>
                   <a:srgbClr val="5B6677"/>
                 </a:solidFill>
@@ -2831,122 +2891,8 @@
                 <a:ea typeface="Noto Sans SC" pitchFamily="34" charset="-122"/>
                 <a:cs typeface="Noto Sans SC" pitchFamily="34" charset="-120"/>
               </a:rPr>
-              <a:t>2. First student says </a:t>
-            </a:r>
-            <a:pPr algn="l" indent="0" marL="0">
-              <a:lnSpc>
-                <a:spcPts val="1470"/>
-              </a:lnSpc>
-              <a:spcAft>
-                <a:spcPts val="500"/>
-              </a:spcAft>
-              <a:buNone/>
-            </a:pPr>
-            <a:r>
-              <a:rPr lang="en-US" sz="1050" b="1" dirty="0">
-                <a:solidFill>
-                  <a:srgbClr val="5B6677"/>
-                </a:solidFill>
-                <a:latin typeface="Noto Sans SC" pitchFamily="34" charset="0"/>
-                <a:ea typeface="Noto Sans SC" pitchFamily="34" charset="-122"/>
-                <a:cs typeface="Noto Sans SC" pitchFamily="34" charset="-120"/>
-              </a:rPr>
-              <a:t>one sport</a:t>
-            </a:r>
-            <a:pPr algn="l" indent="0" marL="0">
-              <a:lnSpc>
-                <a:spcPts val="1470"/>
-              </a:lnSpc>
-              <a:spcAft>
-                <a:spcPts val="500"/>
-              </a:spcAft>
-              <a:buNone/>
-            </a:pPr>
-            <a:r>
-              <a:rPr lang="en-US" sz="1050" dirty="0">
-                <a:solidFill>
-                  <a:srgbClr val="5B6677"/>
-                </a:solidFill>
-                <a:latin typeface="Noto Sans SC" pitchFamily="34" charset="0"/>
-                <a:ea typeface="Noto Sans SC" pitchFamily="34" charset="-122"/>
-                <a:cs typeface="Noto Sans SC" pitchFamily="34" charset="-120"/>
-              </a:rPr>
-              <a:t> in Chinese.</a:t>
-            </a:r>
-            <a:endParaRPr lang="en-US" sz="1050" dirty="0"/>
-          </a:p>
-        </p:txBody>
-      </p:sp>
-      <p:sp>
-        <p:nvSpPr>
-          <p:cNvPr id="16" name="Text 14"/>
-          <p:cNvSpPr/>
-          <p:nvPr/>
-        </p:nvSpPr>
-        <p:spPr>
-          <a:xfrm>
-            <a:off x="634901" y="2208014"/>
-            <a:ext cx="5259425" cy="186630"/>
-          </a:xfrm>
-          <a:prstGeom prst="rect">
-            <a:avLst/>
-          </a:prstGeom>
-          <a:noFill/>
-          <a:ln/>
-        </p:spPr>
-        <p:txBody>
-          <a:bodyPr wrap="square" lIns="0" tIns="0" rIns="0" bIns="0" rtlCol="0" anchor="t"/>
-          <a:lstStyle/>
-          <a:p>
-            <a:pPr algn="l" indent="0" marL="0">
-              <a:lnSpc>
-                <a:spcPts val="1470"/>
-              </a:lnSpc>
-              <a:spcAft>
-                <a:spcPts val="500"/>
-              </a:spcAft>
-              <a:buNone/>
-            </a:pPr>
-            <a:r>
-              <a:rPr lang="en-US" sz="1050" dirty="0">
-                <a:solidFill>
-                  <a:srgbClr val="5B6677"/>
-                </a:solidFill>
-                <a:latin typeface="Noto Sans SC" pitchFamily="34" charset="0"/>
-                <a:ea typeface="Noto Sans SC" pitchFamily="34" charset="-122"/>
-                <a:cs typeface="Noto Sans SC" pitchFamily="34" charset="-120"/>
-              </a:rPr>
-              <a:t>3. Next student </a:t>
-            </a:r>
-            <a:pPr algn="l" indent="0" marL="0">
-              <a:lnSpc>
-                <a:spcPts val="1470"/>
-              </a:lnSpc>
-              <a:spcAft>
-                <a:spcPts val="500"/>
-              </a:spcAft>
-              <a:buNone/>
-            </a:pPr>
-            <a:r>
-              <a:rPr lang="en-US" sz="1050" b="1" dirty="0">
-                <a:solidFill>
-                  <a:srgbClr val="5B6677"/>
-                </a:solidFill>
-                <a:latin typeface="Noto Sans SC" pitchFamily="34" charset="0"/>
-                <a:ea typeface="Noto Sans SC" pitchFamily="34" charset="-122"/>
-                <a:cs typeface="Noto Sans SC" pitchFamily="34" charset="-120"/>
-              </a:rPr>
               <a:t>repeats it and adds a new one</a:t>
             </a:r>
-            <a:pPr algn="l" indent="0" marL="0">
-              <a:lnSpc>
-                <a:spcPts val="1470"/>
-              </a:lnSpc>
-              <a:spcAft>
-                <a:spcPts val="500"/>
-              </a:spcAft>
-              <a:buNone/>
-            </a:pPr>
             <a:r>
               <a:rPr lang="en-US" sz="1050" dirty="0">
                 <a:solidFill>
@@ -3078,9 +3024,6 @@
               </a:rPr>
               <a:t>Goal: aim for </a:t>
             </a:r>
-            <a:pPr algn="l" indent="0" marL="0">
-              <a:buNone/>
-            </a:pPr>
             <a:r>
               <a:rPr lang="en-US" sz="1000" b="1" dirty="0">
                 <a:solidFill>
@@ -3092,9 +3035,6 @@
               </a:rPr>
               <a:t>10 total sports</a:t>
             </a:r>
-            <a:pPr algn="l" indent="0" marL="0">
-              <a:buNone/>
-            </a:pPr>
             <a:r>
               <a:rPr lang="en-US" sz="1000" dirty="0">
                 <a:solidFill>
@@ -5499,6 +5439,53 @@
               </a:rPr>
               <a:t>1️⃣ </a:t>
             </a:r>
+            <a:r>
+              <a:rPr lang="en-US" sz="1000" b="1" dirty="0">
+                <a:solidFill>
+                  <a:srgbClr val="1E2A38"/>
+                </a:solidFill>
+                <a:latin typeface="Noto Sans SC" pitchFamily="34" charset="0"/>
+                <a:ea typeface="Noto Sans SC" pitchFamily="34" charset="-122"/>
+                <a:cs typeface="Noto Sans SC" pitchFamily="34" charset="-120"/>
+              </a:rPr>
+              <a:t>Two students</a:t>
+            </a:r>
+            <a:r>
+              <a:rPr lang="en-US" sz="1000" dirty="0">
+                <a:solidFill>
+                  <a:srgbClr val="1E2A38"/>
+                </a:solidFill>
+                <a:latin typeface="Noto Sans SC" pitchFamily="34" charset="0"/>
+                <a:ea typeface="Noto Sans SC" pitchFamily="34" charset="-122"/>
+                <a:cs typeface="Noto Sans SC" pitchFamily="34" charset="-120"/>
+              </a:rPr>
+              <a:t> at the board (or a table with cards spread out).</a:t>
+            </a:r>
+            <a:endParaRPr lang="en-US" sz="1000" dirty="0"/>
+          </a:p>
+        </p:txBody>
+      </p:sp>
+      <p:sp>
+        <p:nvSpPr>
+          <p:cNvPr id="37" name="Text 35"/>
+          <p:cNvSpPr/>
+          <p:nvPr/>
+        </p:nvSpPr>
+        <p:spPr>
+          <a:xfrm>
+            <a:off x="5130552" y="2098328"/>
+            <a:ext cx="6581037" cy="209550"/>
+          </a:xfrm>
+          <a:prstGeom prst="rect">
+            <a:avLst/>
+          </a:prstGeom>
+          <a:noFill/>
+          <a:ln/>
+        </p:spPr>
+        <p:txBody>
+          <a:bodyPr wrap="square" lIns="0" tIns="0" rIns="0" bIns="0" rtlCol="0" anchor="t"/>
+          <a:lstStyle/>
+          <a:p>
             <a:pPr algn="l" indent="0" marL="0">
               <a:spcAft>
                 <a:spcPts val="400"/>
@@ -5506,6 +5493,17 @@
               <a:buNone/>
             </a:pPr>
             <a:r>
+              <a:rPr lang="en-US" sz="1000" dirty="0">
+                <a:solidFill>
+                  <a:srgbClr val="1E2A38"/>
+                </a:solidFill>
+                <a:latin typeface="Noto Sans SC" pitchFamily="34" charset="0"/>
+                <a:ea typeface="Noto Sans SC" pitchFamily="34" charset="-122"/>
+                <a:cs typeface="Noto Sans SC" pitchFamily="34" charset="-120"/>
+              </a:rPr>
+              <a:t>2️⃣ Teacher calls out a </a:t>
+            </a:r>
+            <a:r>
               <a:rPr lang="en-US" sz="1000" b="1" dirty="0">
                 <a:solidFill>
                   <a:srgbClr val="1E2A38"/>
@@ -5514,8 +5512,44 @@
                 <a:ea typeface="Noto Sans SC" pitchFamily="34" charset="-122"/>
                 <a:cs typeface="Noto Sans SC" pitchFamily="34" charset="-120"/>
               </a:rPr>
-              <a:t>Two students</a:t>
-            </a:r>
+              <a:t>sport in Chinese</a:t>
+            </a:r>
+            <a:r>
+              <a:rPr lang="en-US" sz="1000" dirty="0">
+                <a:solidFill>
+                  <a:srgbClr val="1E2A38"/>
+                </a:solidFill>
+                <a:latin typeface="Noto Sans SC" pitchFamily="34" charset="0"/>
+                <a:ea typeface="Noto Sans SC" pitchFamily="34" charset="-122"/>
+                <a:cs typeface="Noto Sans SC" pitchFamily="34" charset="-120"/>
+              </a:rPr>
+              <a:t>.</a:t>
+            </a:r>
+            <a:endParaRPr lang="en-US" sz="1000" dirty="0"/>
+          </a:p>
+        </p:txBody>
+      </p:sp>
+      <p:sp>
+        <p:nvSpPr>
+          <p:cNvPr id="38" name="Text 36"/>
+          <p:cNvSpPr/>
+          <p:nvPr/>
+        </p:nvSpPr>
+        <p:spPr>
+          <a:xfrm>
+            <a:off x="5130552" y="2358628"/>
+            <a:ext cx="6581037" cy="209550"/>
+          </a:xfrm>
+          <a:prstGeom prst="rect">
+            <a:avLst/>
+          </a:prstGeom>
+          <a:noFill/>
+          <a:ln/>
+        </p:spPr>
+        <p:txBody>
+          <a:bodyPr wrap="square" lIns="0" tIns="0" rIns="0" bIns="0" rtlCol="0" anchor="t"/>
+          <a:lstStyle/>
+          <a:p>
             <a:pPr algn="l" indent="0" marL="0">
               <a:spcAft>
                 <a:spcPts val="400"/>
@@ -5531,7 +5565,29 @@
                 <a:ea typeface="Noto Sans SC" pitchFamily="34" charset="-122"/>
                 <a:cs typeface="Noto Sans SC" pitchFamily="34" charset="-120"/>
               </a:rPr>
-              <a:t> at the board (or a table with cards spread out).</a:t>
+              <a:t>3️⃣ Both students </a:t>
+            </a:r>
+            <a:r>
+              <a:rPr lang="en-US" sz="1000" b="1" dirty="0">
+                <a:solidFill>
+                  <a:srgbClr val="1E2A38"/>
+                </a:solidFill>
+                <a:latin typeface="Noto Sans SC" pitchFamily="34" charset="0"/>
+                <a:ea typeface="Noto Sans SC" pitchFamily="34" charset="-122"/>
+                <a:cs typeface="Noto Sans SC" pitchFamily="34" charset="-120"/>
+              </a:rPr>
+              <a:t>slap the matching card/word</a:t>
+            </a:r>
+            <a:r>
+              <a:rPr lang="en-US" sz="1000" dirty="0">
+                <a:solidFill>
+                  <a:srgbClr val="1E2A38"/>
+                </a:solidFill>
+                <a:latin typeface="Noto Sans SC" pitchFamily="34" charset="0"/>
+                <a:ea typeface="Noto Sans SC" pitchFamily="34" charset="-122"/>
+                <a:cs typeface="Noto Sans SC" pitchFamily="34" charset="-120"/>
+              </a:rPr>
+              <a:t>.</a:t>
             </a:r>
             <a:endParaRPr lang="en-US" sz="1000" dirty="0"/>
           </a:p>
@@ -5539,13 +5595,13 @@
       </p:sp>
       <p:sp>
         <p:nvSpPr>
-          <p:cNvPr id="37" name="Text 35"/>
-          <p:cNvSpPr/>
-          <p:nvPr/>
-        </p:nvSpPr>
-        <p:spPr>
-          <a:xfrm>
-            <a:off x="5130552" y="2098328"/>
+          <p:cNvPr id="39" name="Text 37"/>
+          <p:cNvSpPr/>
+          <p:nvPr/>
+        </p:nvSpPr>
+        <p:spPr>
+          <a:xfrm>
+            <a:off x="5130552" y="2618929"/>
             <a:ext cx="6581037" cy="209550"/>
           </a:xfrm>
           <a:prstGeom prst="rect">
@@ -5573,14 +5629,8 @@
                 <a:ea typeface="Noto Sans SC" pitchFamily="34" charset="-122"/>
                 <a:cs typeface="Noto Sans SC" pitchFamily="34" charset="-120"/>
               </a:rPr>
-              <a:t>2️⃣ Teacher calls out a </a:t>
-            </a:r>
-            <a:pPr algn="l" indent="0" marL="0">
-              <a:spcAft>
-                <a:spcPts val="400"/>
-              </a:spcAft>
-              <a:buNone/>
-            </a:pPr>
+              <a:t>🏆 </a:t>
+            </a:r>
             <a:r>
               <a:rPr lang="en-US" sz="1000" b="1" dirty="0">
                 <a:solidFill>
@@ -5590,166 +5640,8 @@
                 <a:ea typeface="Noto Sans SC" pitchFamily="34" charset="-122"/>
                 <a:cs typeface="Noto Sans SC" pitchFamily="34" charset="-120"/>
               </a:rPr>
-              <a:t>sport in Chinese</a:t>
-            </a:r>
-            <a:pPr algn="l" indent="0" marL="0">
-              <a:spcAft>
-                <a:spcPts val="400"/>
-              </a:spcAft>
-              <a:buNone/>
-            </a:pPr>
-            <a:r>
-              <a:rPr lang="en-US" sz="1000" dirty="0">
-                <a:solidFill>
-                  <a:srgbClr val="1E2A38"/>
-                </a:solidFill>
-                <a:latin typeface="Noto Sans SC" pitchFamily="34" charset="0"/>
-                <a:ea typeface="Noto Sans SC" pitchFamily="34" charset="-122"/>
-                <a:cs typeface="Noto Sans SC" pitchFamily="34" charset="-120"/>
-              </a:rPr>
-              <a:t>.</a:t>
-            </a:r>
-            <a:endParaRPr lang="en-US" sz="1000" dirty="0"/>
-          </a:p>
-        </p:txBody>
-      </p:sp>
-      <p:sp>
-        <p:nvSpPr>
-          <p:cNvPr id="38" name="Text 36"/>
-          <p:cNvSpPr/>
-          <p:nvPr/>
-        </p:nvSpPr>
-        <p:spPr>
-          <a:xfrm>
-            <a:off x="5130552" y="2358628"/>
-            <a:ext cx="6581037" cy="209550"/>
-          </a:xfrm>
-          <a:prstGeom prst="rect">
-            <a:avLst/>
-          </a:prstGeom>
-          <a:noFill/>
-          <a:ln/>
-        </p:spPr>
-        <p:txBody>
-          <a:bodyPr wrap="square" lIns="0" tIns="0" rIns="0" bIns="0" rtlCol="0" anchor="t"/>
-          <a:lstStyle/>
-          <a:p>
-            <a:pPr algn="l" indent="0" marL="0">
-              <a:spcAft>
-                <a:spcPts val="400"/>
-              </a:spcAft>
-              <a:buNone/>
-            </a:pPr>
-            <a:r>
-              <a:rPr lang="en-US" sz="1000" dirty="0">
-                <a:solidFill>
-                  <a:srgbClr val="1E2A38"/>
-                </a:solidFill>
-                <a:latin typeface="Noto Sans SC" pitchFamily="34" charset="0"/>
-                <a:ea typeface="Noto Sans SC" pitchFamily="34" charset="-122"/>
-                <a:cs typeface="Noto Sans SC" pitchFamily="34" charset="-120"/>
-              </a:rPr>
-              <a:t>3️⃣ Both students </a:t>
-            </a:r>
-            <a:pPr algn="l" indent="0" marL="0">
-              <a:spcAft>
-                <a:spcPts val="400"/>
-              </a:spcAft>
-              <a:buNone/>
-            </a:pPr>
-            <a:r>
-              <a:rPr lang="en-US" sz="1000" b="1" dirty="0">
-                <a:solidFill>
-                  <a:srgbClr val="1E2A38"/>
-                </a:solidFill>
-                <a:latin typeface="Noto Sans SC" pitchFamily="34" charset="0"/>
-                <a:ea typeface="Noto Sans SC" pitchFamily="34" charset="-122"/>
-                <a:cs typeface="Noto Sans SC" pitchFamily="34" charset="-120"/>
-              </a:rPr>
-              <a:t>slap the matching card/word</a:t>
-            </a:r>
-            <a:pPr algn="l" indent="0" marL="0">
-              <a:spcAft>
-                <a:spcPts val="400"/>
-              </a:spcAft>
-              <a:buNone/>
-            </a:pPr>
-            <a:r>
-              <a:rPr lang="en-US" sz="1000" dirty="0">
-                <a:solidFill>
-                  <a:srgbClr val="1E2A38"/>
-                </a:solidFill>
-                <a:latin typeface="Noto Sans SC" pitchFamily="34" charset="0"/>
-                <a:ea typeface="Noto Sans SC" pitchFamily="34" charset="-122"/>
-                <a:cs typeface="Noto Sans SC" pitchFamily="34" charset="-120"/>
-              </a:rPr>
-              <a:t>.</a:t>
-            </a:r>
-            <a:endParaRPr lang="en-US" sz="1000" dirty="0"/>
-          </a:p>
-        </p:txBody>
-      </p:sp>
-      <p:sp>
-        <p:nvSpPr>
-          <p:cNvPr id="39" name="Text 37"/>
-          <p:cNvSpPr/>
-          <p:nvPr/>
-        </p:nvSpPr>
-        <p:spPr>
-          <a:xfrm>
-            <a:off x="5130552" y="2618929"/>
-            <a:ext cx="6581037" cy="209550"/>
-          </a:xfrm>
-          <a:prstGeom prst="rect">
-            <a:avLst/>
-          </a:prstGeom>
-          <a:noFill/>
-          <a:ln/>
-        </p:spPr>
-        <p:txBody>
-          <a:bodyPr wrap="square" lIns="0" tIns="0" rIns="0" bIns="0" rtlCol="0" anchor="t"/>
-          <a:lstStyle/>
-          <a:p>
-            <a:pPr algn="l" indent="0" marL="0">
-              <a:spcAft>
-                <a:spcPts val="400"/>
-              </a:spcAft>
-              <a:buNone/>
-            </a:pPr>
-            <a:r>
-              <a:rPr lang="en-US" sz="1000" dirty="0">
-                <a:solidFill>
-                  <a:srgbClr val="1E2A38"/>
-                </a:solidFill>
-                <a:latin typeface="Noto Sans SC" pitchFamily="34" charset="0"/>
-                <a:ea typeface="Noto Sans SC" pitchFamily="34" charset="-122"/>
-                <a:cs typeface="Noto Sans SC" pitchFamily="34" charset="-120"/>
-              </a:rPr>
-              <a:t>🏆 </a:t>
-            </a:r>
-            <a:pPr algn="l" indent="0" marL="0">
-              <a:spcAft>
-                <a:spcPts val="400"/>
-              </a:spcAft>
-              <a:buNone/>
-            </a:pPr>
-            <a:r>
-              <a:rPr lang="en-US" sz="1000" b="1" dirty="0">
-                <a:solidFill>
-                  <a:srgbClr val="1E2A38"/>
-                </a:solidFill>
-                <a:latin typeface="Noto Sans SC" pitchFamily="34" charset="0"/>
-                <a:ea typeface="Noto Sans SC" pitchFamily="34" charset="-122"/>
-                <a:cs typeface="Noto Sans SC" pitchFamily="34" charset="-120"/>
-              </a:rPr>
               <a:t>Winner stays</a:t>
             </a:r>
-            <a:pPr algn="l" indent="0" marL="0">
-              <a:spcAft>
-                <a:spcPts val="400"/>
-              </a:spcAft>
-              <a:buNone/>
-            </a:pPr>
             <a:r>
               <a:rPr lang="en-US" sz="1000" dirty="0">
                 <a:solidFill>
@@ -6942,12 +6834,6 @@
               </a:rPr>
               <a:t>Choral read the success criteria from the board — class calls out </a:t>
             </a:r>
-            <a:pPr algn="l" indent="0" marL="0">
-              <a:lnSpc>
-                <a:spcPts val="1425"/>
-              </a:lnSpc>
-              <a:buNone/>
-            </a:pPr>
             <a:r>
               <a:rPr lang="en-US" sz="950" b="1" dirty="0">
                 <a:solidFill>
@@ -6959,12 +6845,6 @@
               </a:rPr>
               <a:t>one example sport per criterion</a:t>
             </a:r>
-            <a:pPr algn="l" indent="0" marL="0">
-              <a:lnSpc>
-                <a:spcPts val="1425"/>
-              </a:lnSpc>
-              <a:buNone/>
-            </a:pPr>
             <a:r>
               <a:rPr lang="en-US" sz="950" dirty="0">
                 <a:solidFill>
@@ -7715,9 +7595,6 @@
               </a:rPr>
               <a:t>ou </a:t>
             </a:r>
-            <a:pPr algn="ctr" indent="0" marL="0">
-              <a:buNone/>
-            </a:pPr>
             <a:r>
               <a:rPr lang="en-US" sz="1700" b="1" dirty="0">
                 <a:solidFill>
@@ -7729,9 +7606,6 @@
               </a:rPr>
               <a:t>vs</a:t>
             </a:r>
-            <a:pPr algn="ctr" indent="0" marL="0">
-              <a:buNone/>
-            </a:pPr>
             <a:r>
               <a:rPr lang="en-US" sz="1700" dirty="0">
                 <a:solidFill>
@@ -8158,6 +8032,53 @@
               </a:rPr>
               <a:t>1. In pairs, recreate the pattern </a:t>
             </a:r>
+            <a:r>
+              <a:rPr lang="en-US" sz="1100" b="1" dirty="0">
+                <a:solidFill>
+                  <a:srgbClr val="5B6677"/>
+                </a:solidFill>
+                <a:latin typeface="Noto Sans SC" pitchFamily="34" charset="0"/>
+                <a:ea typeface="Noto Sans SC" pitchFamily="34" charset="-122"/>
+                <a:cs typeface="Noto Sans SC" pitchFamily="34" charset="-120"/>
+              </a:rPr>
+              <a:t>我喜欢跟朋友一起打网球</a:t>
+            </a:r>
+            <a:r>
+              <a:rPr lang="en-US" sz="1100" dirty="0">
+                <a:solidFill>
+                  <a:srgbClr val="5B6677"/>
+                </a:solidFill>
+                <a:latin typeface="Noto Sans SC" pitchFamily="34" charset="0"/>
+                <a:ea typeface="Noto Sans SC" pitchFamily="34" charset="-122"/>
+                <a:cs typeface="Noto Sans SC" pitchFamily="34" charset="-120"/>
+              </a:rPr>
+              <a:t> from memory — no notes.</a:t>
+            </a:r>
+            <a:endParaRPr lang="en-US" sz="1100" dirty="0"/>
+          </a:p>
+        </p:txBody>
+      </p:sp>
+      <p:sp>
+        <p:nvSpPr>
+          <p:cNvPr id="10" name="Text 8"/>
+          <p:cNvSpPr/>
+          <p:nvPr/>
+        </p:nvSpPr>
+        <p:spPr>
+          <a:xfrm>
+            <a:off x="660350" y="2184648"/>
+            <a:ext cx="5181701" cy="195560"/>
+          </a:xfrm>
+          <a:prstGeom prst="rect">
+            <a:avLst/>
+          </a:prstGeom>
+          <a:noFill/>
+          <a:ln/>
+        </p:spPr>
+        <p:txBody>
+          <a:bodyPr wrap="square" lIns="0" tIns="0" rIns="0" bIns="0" rtlCol="0" anchor="t"/>
+          <a:lstStyle/>
+          <a:p>
             <a:pPr algn="l" indent="0" marL="0">
               <a:lnSpc>
                 <a:spcPts val="1540"/>
@@ -8168,6 +8089,17 @@
               <a:buNone/>
             </a:pPr>
             <a:r>
+              <a:rPr lang="en-US" sz="1100" dirty="0">
+                <a:solidFill>
+                  <a:srgbClr val="5B6677"/>
+                </a:solidFill>
+                <a:latin typeface="Noto Sans SC" pitchFamily="34" charset="0"/>
+                <a:ea typeface="Noto Sans SC" pitchFamily="34" charset="-122"/>
+                <a:cs typeface="Noto Sans SC" pitchFamily="34" charset="-120"/>
+              </a:rPr>
+              <a:t>2. Swap roles, then </a:t>
+            </a:r>
+            <a:r>
               <a:rPr lang="en-US" sz="1100" b="1" dirty="0">
                 <a:solidFill>
                   <a:srgbClr val="5B6677"/>
@@ -8176,102 +8108,8 @@
                 <a:ea typeface="Noto Sans SC" pitchFamily="34" charset="-122"/>
                 <a:cs typeface="Noto Sans SC" pitchFamily="34" charset="-120"/>
               </a:rPr>
-              <a:t>我喜欢跟朋友一起打网球</a:t>
-            </a:r>
-            <a:pPr algn="l" indent="0" marL="0">
-              <a:lnSpc>
-                <a:spcPts val="1540"/>
-              </a:lnSpc>
-              <a:spcAft>
-                <a:spcPts val="600"/>
-              </a:spcAft>
-              <a:buNone/>
-            </a:pPr>
-            <a:r>
-              <a:rPr lang="en-US" sz="1100" dirty="0">
-                <a:solidFill>
-                  <a:srgbClr val="5B6677"/>
-                </a:solidFill>
-                <a:latin typeface="Noto Sans SC" pitchFamily="34" charset="0"/>
-                <a:ea typeface="Noto Sans SC" pitchFamily="34" charset="-122"/>
-                <a:cs typeface="Noto Sans SC" pitchFamily="34" charset="-120"/>
-              </a:rPr>
-              <a:t> from memory — no notes.</a:t>
-            </a:r>
-            <a:endParaRPr lang="en-US" sz="1100" dirty="0"/>
-          </a:p>
-        </p:txBody>
-      </p:sp>
-      <p:sp>
-        <p:nvSpPr>
-          <p:cNvPr id="10" name="Text 8"/>
-          <p:cNvSpPr/>
-          <p:nvPr/>
-        </p:nvSpPr>
-        <p:spPr>
-          <a:xfrm>
-            <a:off x="660350" y="2184648"/>
-            <a:ext cx="5181701" cy="195560"/>
-          </a:xfrm>
-          <a:prstGeom prst="rect">
-            <a:avLst/>
-          </a:prstGeom>
-          <a:noFill/>
-          <a:ln/>
-        </p:spPr>
-        <p:txBody>
-          <a:bodyPr wrap="square" lIns="0" tIns="0" rIns="0" bIns="0" rtlCol="0" anchor="t"/>
-          <a:lstStyle/>
-          <a:p>
-            <a:pPr algn="l" indent="0" marL="0">
-              <a:lnSpc>
-                <a:spcPts val="1540"/>
-              </a:lnSpc>
-              <a:spcAft>
-                <a:spcPts val="600"/>
-              </a:spcAft>
-              <a:buNone/>
-            </a:pPr>
-            <a:r>
-              <a:rPr lang="en-US" sz="1100" dirty="0">
-                <a:solidFill>
-                  <a:srgbClr val="5B6677"/>
-                </a:solidFill>
-                <a:latin typeface="Noto Sans SC" pitchFamily="34" charset="0"/>
-                <a:ea typeface="Noto Sans SC" pitchFamily="34" charset="-122"/>
-                <a:cs typeface="Noto Sans SC" pitchFamily="34" charset="-120"/>
-              </a:rPr>
-              <a:t>2. Swap roles, then </a:t>
-            </a:r>
-            <a:pPr algn="l" indent="0" marL="0">
-              <a:lnSpc>
-                <a:spcPts val="1540"/>
-              </a:lnSpc>
-              <a:spcAft>
-                <a:spcPts val="600"/>
-              </a:spcAft>
-              <a:buNone/>
-            </a:pPr>
-            <a:r>
-              <a:rPr lang="en-US" sz="1100" b="1" dirty="0">
-                <a:solidFill>
-                  <a:srgbClr val="5B6677"/>
-                </a:solidFill>
-                <a:latin typeface="Noto Sans SC" pitchFamily="34" charset="0"/>
-                <a:ea typeface="Noto Sans SC" pitchFamily="34" charset="-122"/>
-                <a:cs typeface="Noto Sans SC" pitchFamily="34" charset="-120"/>
-              </a:rPr>
               <a:t>vary the sport</a:t>
             </a:r>
-            <a:pPr algn="l" indent="0" marL="0">
-              <a:lnSpc>
-                <a:spcPts val="1540"/>
-              </a:lnSpc>
-              <a:spcAft>
-                <a:spcPts val="600"/>
-              </a:spcAft>
-              <a:buNone/>
-            </a:pPr>
             <a:r>
               <a:rPr lang="en-US" sz="1100" dirty="0">
                 <a:solidFill>
@@ -9002,12 +8840,6 @@
               </a:rPr>
               <a:t>"Yesterday you learned </a:t>
             </a:r>
-            <a:pPr algn="l" indent="0" marL="0">
-              <a:lnSpc>
-                <a:spcPts val="1540"/>
-              </a:lnSpc>
-              <a:buNone/>
-            </a:pPr>
             <a:r>
               <a:rPr lang="en-US" sz="1100" b="1" dirty="0">
                 <a:solidFill>
@@ -9019,12 +8851,6 @@
               </a:rPr>
               <a:t>3 sports</a:t>
             </a:r>
-            <a:pPr algn="l" indent="0" marL="0">
-              <a:lnSpc>
-                <a:spcPts val="1540"/>
-              </a:lnSpc>
-              <a:buNone/>
-            </a:pPr>
             <a:r>
               <a:rPr lang="en-US" sz="1100" dirty="0">
                 <a:solidFill>
@@ -9036,12 +8862,6 @@
               </a:rPr>
               <a:t> and one verb rule. Today you're getting </a:t>
             </a:r>
-            <a:pPr algn="l" indent="0" marL="0">
-              <a:lnSpc>
-                <a:spcPts val="1540"/>
-              </a:lnSpc>
-              <a:buNone/>
-            </a:pPr>
             <a:r>
               <a:rPr lang="en-US" sz="1100" b="1" dirty="0">
                 <a:solidFill>
@@ -9053,12 +8873,6 @@
               </a:rPr>
               <a:t>8 more sports</a:t>
             </a:r>
-            <a:pPr algn="l" indent="0" marL="0">
-              <a:lnSpc>
-                <a:spcPts val="1540"/>
-              </a:lnSpc>
-              <a:buNone/>
-            </a:pPr>
             <a:r>
               <a:rPr lang="en-US" sz="1100" dirty="0">
                 <a:solidFill>
@@ -9070,12 +8884,6 @@
               </a:rPr>
               <a:t> — and a second verb, </a:t>
             </a:r>
-            <a:pPr algn="l" indent="0" marL="0">
-              <a:lnSpc>
-                <a:spcPts val="1540"/>
-              </a:lnSpc>
-              <a:buNone/>
-            </a:pPr>
             <a:r>
               <a:rPr lang="en-US" sz="1100" b="1" dirty="0">
                 <a:solidFill>
@@ -9087,12 +8895,6 @@
               </a:rPr>
               <a:t>踢</a:t>
             </a:r>
-            <a:pPr algn="l" indent="0" marL="0">
-              <a:lnSpc>
-                <a:spcPts val="1540"/>
-              </a:lnSpc>
-              <a:buNone/>
-            </a:pPr>
             <a:r>
               <a:rPr lang="en-US" sz="1100" dirty="0">
                 <a:solidFill>
@@ -9495,12 +9297,6 @@
               </a:rPr>
               <a:t>We are learning to name </a:t>
             </a:r>
-            <a:pPr algn="l" indent="0" marL="0">
-              <a:lnSpc>
-                <a:spcPts val="1820"/>
-              </a:lnSpc>
-              <a:buNone/>
-            </a:pPr>
             <a:r>
               <a:rPr lang="en-US" sz="1300" b="1" dirty="0">
                 <a:solidFill>
@@ -9512,12 +9308,6 @@
               </a:rPr>
               <a:t>more sports</a:t>
             </a:r>
-            <a:pPr algn="l" indent="0" marL="0">
-              <a:lnSpc>
-                <a:spcPts val="1820"/>
-              </a:lnSpc>
-              <a:buNone/>
-            </a:pPr>
             <a:r>
               <a:rPr lang="en-US" sz="1300" dirty="0">
                 <a:solidFill>
@@ -9529,12 +9319,6 @@
               </a:rPr>
               <a:t> in Chinese and say who we do them with using </a:t>
             </a:r>
-            <a:pPr algn="l" indent="0" marL="0">
-              <a:lnSpc>
-                <a:spcPts val="1820"/>
-              </a:lnSpc>
-              <a:buNone/>
-            </a:pPr>
             <a:r>
               <a:rPr lang="en-US" sz="1300" b="1" dirty="0">
                 <a:solidFill>
@@ -9546,12 +9330,6 @@
               </a:rPr>
               <a:t>跟(和)……一起</a:t>
             </a:r>
-            <a:pPr algn="l" indent="0" marL="0">
-              <a:lnSpc>
-                <a:spcPts val="1820"/>
-              </a:lnSpc>
-              <a:buNone/>
-            </a:pPr>
             <a:r>
               <a:rPr lang="en-US" sz="1300" dirty="0">
                 <a:solidFill>
@@ -9678,12 +9456,6 @@
               </a:rPr>
               <a:t>I can name </a:t>
             </a:r>
-            <a:pPr algn="l" indent="0" marL="0">
-              <a:lnSpc>
-                <a:spcPts val="1680"/>
-              </a:lnSpc>
-              <a:buNone/>
-            </a:pPr>
             <a:r>
               <a:rPr lang="en-US" sz="1200" b="1" dirty="0">
                 <a:solidFill>
@@ -9695,12 +9467,6 @@
               </a:rPr>
               <a:t>at least 8 sports</a:t>
             </a:r>
-            <a:pPr algn="l" indent="0" marL="0">
-              <a:lnSpc>
-                <a:spcPts val="1680"/>
-              </a:lnSpc>
-              <a:buNone/>
-            </a:pPr>
             <a:r>
               <a:rPr lang="en-US" sz="1200" dirty="0">
                 <a:solidFill>
@@ -9712,12 +9478,6 @@
               </a:rPr>
               <a:t> in Chinese — </a:t>
             </a:r>
-            <a:pPr algn="l" indent="0" marL="0">
-              <a:lnSpc>
-                <a:spcPts val="1680"/>
-              </a:lnSpc>
-              <a:buNone/>
-            </a:pPr>
             <a:r>
               <a:rPr lang="en-US" sz="1200" dirty="0">
                 <a:solidFill>
@@ -9844,12 +9604,6 @@
               </a:rPr>
               <a:t>I can use </a:t>
             </a:r>
-            <a:pPr algn="l" indent="0" marL="0">
-              <a:lnSpc>
-                <a:spcPts val="1680"/>
-              </a:lnSpc>
-              <a:buNone/>
-            </a:pPr>
             <a:r>
               <a:rPr lang="en-US" sz="1200" dirty="0">
                 <a:solidFill>
@@ -9861,12 +9615,6 @@
               </a:rPr>
               <a:t>跟(和)……一起</a:t>
             </a:r>
-            <a:pPr algn="l" indent="0" marL="0">
-              <a:lnSpc>
-                <a:spcPts val="1680"/>
-              </a:lnSpc>
-              <a:buNone/>
-            </a:pPr>
             <a:r>
               <a:rPr lang="en-US" sz="1200" dirty="0">
                 <a:solidFill>
@@ -9878,12 +9626,6 @@
               </a:rPr>
               <a:t> to make a </a:t>
             </a:r>
-            <a:pPr algn="l" indent="0" marL="0">
-              <a:lnSpc>
-                <a:spcPts val="1680"/>
-              </a:lnSpc>
-              <a:buNone/>
-            </a:pPr>
             <a:r>
               <a:rPr lang="en-US" sz="1200" b="1" dirty="0">
                 <a:solidFill>
@@ -9895,12 +9637,6 @@
               </a:rPr>
               <a:t>full sentence</a:t>
             </a:r>
-            <a:pPr algn="l" indent="0" marL="0">
-              <a:lnSpc>
-                <a:spcPts val="1680"/>
-              </a:lnSpc>
-              <a:buNone/>
-            </a:pPr>
             <a:r>
               <a:rPr lang="en-US" sz="1200" dirty="0">
                 <a:solidFill>
@@ -10027,12 +9763,6 @@
               </a:rPr>
               <a:t>I can explain why </a:t>
             </a:r>
-            <a:pPr algn="l" indent="0" marL="0">
-              <a:lnSpc>
-                <a:spcPts val="1680"/>
-              </a:lnSpc>
-              <a:buNone/>
-            </a:pPr>
             <a:r>
               <a:rPr lang="en-US" sz="1200" dirty="0">
                 <a:solidFill>
@@ -10044,12 +9774,6 @@
               </a:rPr>
               <a:t>足球</a:t>
             </a:r>
-            <a:pPr algn="l" indent="0" marL="0">
-              <a:lnSpc>
-                <a:spcPts val="1680"/>
-              </a:lnSpc>
-              <a:buNone/>
-            </a:pPr>
             <a:r>
               <a:rPr lang="en-US" sz="1200" dirty="0">
                 <a:solidFill>
@@ -10061,12 +9785,6 @@
               </a:rPr>
               <a:t> uses </a:t>
             </a:r>
-            <a:pPr algn="l" indent="0" marL="0">
-              <a:lnSpc>
-                <a:spcPts val="1680"/>
-              </a:lnSpc>
-              <a:buNone/>
-            </a:pPr>
             <a:r>
               <a:rPr lang="en-US" sz="1200" b="1" dirty="0">
                 <a:solidFill>
@@ -10078,12 +9796,6 @@
               </a:rPr>
               <a:t>踢</a:t>
             </a:r>
-            <a:pPr algn="l" indent="0" marL="0">
-              <a:lnSpc>
-                <a:spcPts val="1680"/>
-              </a:lnSpc>
-              <a:buNone/>
-            </a:pPr>
             <a:r>
               <a:rPr lang="en-US" sz="1200" dirty="0">
                 <a:solidFill>
@@ -10095,12 +9807,6 @@
               </a:rPr>
               <a:t> and </a:t>
             </a:r>
-            <a:pPr algn="l" indent="0" marL="0">
-              <a:lnSpc>
-                <a:spcPts val="1680"/>
-              </a:lnSpc>
-              <a:buNone/>
-            </a:pPr>
             <a:r>
               <a:rPr lang="en-US" sz="1200" dirty="0">
                 <a:solidFill>
@@ -10112,12 +9818,6 @@
               </a:rPr>
               <a:t>滑冰/滑雪</a:t>
             </a:r>
-            <a:pPr algn="l" indent="0" marL="0">
-              <a:lnSpc>
-                <a:spcPts val="1680"/>
-              </a:lnSpc>
-              <a:buNone/>
-            </a:pPr>
             <a:r>
               <a:rPr lang="en-US" sz="1200" dirty="0">
                 <a:solidFill>
@@ -10129,12 +9829,6 @@
               </a:rPr>
               <a:t> use </a:t>
             </a:r>
-            <a:pPr algn="l" indent="0" marL="0">
-              <a:lnSpc>
-                <a:spcPts val="1680"/>
-              </a:lnSpc>
-              <a:buNone/>
-            </a:pPr>
             <a:r>
               <a:rPr lang="en-US" sz="1200" b="1" dirty="0">
                 <a:solidFill>
@@ -10146,12 +9840,6 @@
               </a:rPr>
               <a:t>no verb</a:t>
             </a:r>
-            <a:pPr algn="l" indent="0" marL="0">
-              <a:lnSpc>
-                <a:spcPts val="1680"/>
-              </a:lnSpc>
-              <a:buNone/>
-            </a:pPr>
             <a:r>
               <a:rPr lang="en-US" sz="1200" dirty="0">
                 <a:solidFill>
@@ -11873,9 +11561,6 @@
               </a:rPr>
               <a:t>🏐 </a:t>
             </a:r>
-            <a:pPr algn="l" indent="0" marL="0">
-              <a:buNone/>
-            </a:pPr>
             <a:r>
               <a:rPr lang="en-US" sz="1100" b="1" dirty="0">
                 <a:solidFill>
@@ -11887,9 +11572,6 @@
               </a:rPr>
               <a:t>球 (qiú)</a:t>
             </a:r>
-            <a:pPr algn="l" indent="0" marL="0">
-              <a:buNone/>
-            </a:pPr>
             <a:r>
               <a:rPr lang="en-US" sz="1100" dirty="0">
                 <a:solidFill>
@@ -11901,9 +11583,6 @@
               </a:rPr>
               <a:t> = ball — appears in almost every word here: </a:t>
             </a:r>
-            <a:pPr algn="l" indent="0" marL="0">
-              <a:buNone/>
-            </a:pPr>
             <a:r>
               <a:rPr lang="en-US" sz="1100" b="1" dirty="0">
                 <a:solidFill>
@@ -12328,9 +12007,6 @@
               </a:rPr>
               <a:t>打 </a:t>
             </a:r>
-            <a:pPr algn="l" indent="0" marL="0">
-              <a:buNone/>
-            </a:pPr>
             <a:r>
               <a:rPr lang="en-US" sz="850" b="1" dirty="0">
                 <a:solidFill>
@@ -12462,9 +12138,6 @@
               </a:rPr>
               <a:t>踢 </a:t>
             </a:r>
-            <a:pPr algn="l" indent="0" marL="0">
-              <a:buNone/>
-            </a:pPr>
             <a:r>
               <a:rPr lang="en-US" sz="850" b="1" dirty="0">
                 <a:solidFill>
@@ -12596,9 +12269,6 @@
               </a:rPr>
               <a:t>— </a:t>
             </a:r>
-            <a:pPr algn="l" indent="0" marL="0">
-              <a:buNone/>
-            </a:pPr>
             <a:r>
               <a:rPr lang="en-US" sz="850" b="1" dirty="0">
                 <a:solidFill>
@@ -12993,9 +12663,6 @@
               </a:rPr>
               <a:t>我喜欢跟朋友一起</a:t>
             </a:r>
-            <a:pPr algn="l" indent="0" marL="0">
-              <a:buNone/>
-            </a:pPr>
             <a:r>
               <a:rPr lang="en-US" sz="1300" dirty="0">
                 <a:solidFill>
@@ -13117,9 +12784,6 @@
               </a:rPr>
               <a:t>我哥哥</a:t>
             </a:r>
-            <a:pPr algn="l" indent="0" marL="0">
-              <a:buNone/>
-            </a:pPr>
             <a:r>
               <a:rPr lang="en-US" sz="1300" b="1" dirty="0">
                 <a:solidFill>
@@ -13131,9 +12795,6 @@
               </a:rPr>
               <a:t>喜欢和同学一起</a:t>
             </a:r>
-            <a:pPr algn="l" indent="0" marL="0">
-              <a:buNone/>
-            </a:pPr>
             <a:r>
               <a:rPr lang="en-US" sz="1300" dirty="0">
                 <a:solidFill>
@@ -13255,9 +12916,6 @@
               </a:rPr>
               <a:t>我们</a:t>
             </a:r>
-            <a:pPr algn="l" indent="0" marL="0">
-              <a:buNone/>
-            </a:pPr>
             <a:r>
               <a:rPr lang="en-US" sz="1300" b="1" dirty="0">
                 <a:solidFill>
@@ -13269,9 +12927,6 @@
               </a:rPr>
               <a:t>喜欢跟家人一起</a:t>
             </a:r>
-            <a:pPr algn="l" indent="0" marL="0">
-              <a:buNone/>
-            </a:pPr>
             <a:r>
               <a:rPr lang="en-US" sz="1300" dirty="0">
                 <a:solidFill>
@@ -13397,9 +13052,6 @@
               </a:rPr>
               <a:t>我喜欢跟</a:t>
             </a:r>
-            <a:pPr algn="l" indent="0" marL="0">
-              <a:buNone/>
-            </a:pPr>
             <a:r>
               <a:rPr lang="en-US" sz="1300" dirty="0">
                 <a:solidFill>
@@ -13411,9 +13063,6 @@
               </a:rPr>
               <a:t>我的狗</a:t>
             </a:r>
-            <a:pPr algn="l" indent="0" marL="0">
-              <a:buNone/>
-            </a:pPr>
             <a:r>
               <a:rPr lang="en-US" sz="1300" b="1" dirty="0">
                 <a:solidFill>
@@ -13425,9 +13074,6 @@
               </a:rPr>
               <a:t>一起</a:t>
             </a:r>
-            <a:pPr algn="l" indent="0" marL="0">
-              <a:buNone/>
-            </a:pPr>
             <a:r>
               <a:rPr lang="en-US" sz="1300" dirty="0">
                 <a:solidFill>
@@ -13439,9 +13085,6 @@
               </a:rPr>
               <a:t>打乒乓球！</a:t>
             </a:r>
-            <a:pPr algn="l" indent="0" marL="0">
-              <a:buNone/>
-            </a:pPr>
             <a:r>
               <a:rPr lang="en-US" sz="800" b="1" dirty="0">
                 <a:solidFill>
@@ -13788,12 +13431,6 @@
               </a:rPr>
               <a:t>Write your answer on your mini whiteboard </a:t>
             </a:r>
-            <a:pPr algn="l" indent="0" marL="0">
-              <a:spcAft>
-                <a:spcPts val="1400"/>
-              </a:spcAft>
-              <a:buNone/>
-            </a:pPr>
             <a:r>
               <a:rPr lang="en-US" sz="800" b="1" dirty="0">
                 <a:solidFill>
@@ -13947,9 +13584,6 @@
               </a:rPr>
               <a:t>Quick translate: </a:t>
             </a:r>
-            <a:pPr algn="l" indent="0" marL="0">
-              <a:buNone/>
-            </a:pPr>
             <a:r>
               <a:rPr lang="en-US" sz="1300" b="1" dirty="0">
                 <a:solidFill>
@@ -13961,9 +13595,6 @@
               </a:rPr>
               <a:t>"play basketball"</a:t>
             </a:r>
-            <a:pPr algn="l" indent="0" marL="0">
-              <a:buNone/>
-            </a:pPr>
             <a:r>
               <a:rPr lang="en-US" sz="1300" dirty="0">
                 <a:solidFill>
@@ -14117,9 +13748,6 @@
               </a:rPr>
               <a:t>Error correction: </a:t>
             </a:r>
-            <a:pPr algn="l" indent="0" marL="0">
-              <a:buNone/>
-            </a:pPr>
             <a:r>
               <a:rPr lang="en-US" sz="1300" b="1" dirty="0">
                 <a:solidFill>
@@ -14131,9 +13759,6 @@
               </a:rPr>
               <a:t>我打足球。</a:t>
             </a:r>
-            <a:pPr algn="l" indent="0" marL="0">
-              <a:buNone/>
-            </a:pPr>
             <a:r>
               <a:rPr lang="en-US" sz="1300" dirty="0">
                 <a:solidFill>
@@ -14287,9 +13912,6 @@
               </a:rPr>
               <a:t>Thumbs up if </a:t>
             </a:r>
-            <a:pPr algn="l" indent="0" marL="0">
-              <a:buNone/>
-            </a:pPr>
             <a:r>
               <a:rPr lang="en-US" sz="1300" b="1" dirty="0">
                 <a:solidFill>
@@ -14301,9 +13923,6 @@
               </a:rPr>
               <a:t>滑雪</a:t>
             </a:r>
-            <a:pPr algn="l" indent="0" marL="0">
-              <a:buNone/>
-            </a:pPr>
             <a:r>
               <a:rPr lang="en-US" sz="1300" dirty="0">
                 <a:solidFill>
@@ -15865,6 +15484,53 @@
               </a:rPr>
               <a:t>1. Teacher projects each of the </a:t>
             </a:r>
+            <a:r>
+              <a:rPr lang="en-US" sz="1050" b="1" dirty="0">
+                <a:solidFill>
+                  <a:srgbClr val="5B6677"/>
+                </a:solidFill>
+                <a:latin typeface="Noto Sans SC" pitchFamily="34" charset="0"/>
+                <a:ea typeface="Noto Sans SC" pitchFamily="34" charset="-122"/>
+                <a:cs typeface="Noto Sans SC" pitchFamily="34" charset="-120"/>
+              </a:rPr>
+              <a:t>8 sport pictures</a:t>
+            </a:r>
+            <a:r>
+              <a:rPr lang="en-US" sz="1050" dirty="0">
+                <a:solidFill>
+                  <a:srgbClr val="5B6677"/>
+                </a:solidFill>
+                <a:latin typeface="Noto Sans SC" pitchFamily="34" charset="0"/>
+                <a:ea typeface="Noto Sans SC" pitchFamily="34" charset="-122"/>
+                <a:cs typeface="Noto Sans SC" pitchFamily="34" charset="-120"/>
+              </a:rPr>
+              <a:t> in random order.</a:t>
+            </a:r>
+            <a:endParaRPr lang="en-US" sz="1050" dirty="0"/>
+          </a:p>
+        </p:txBody>
+      </p:sp>
+      <p:sp>
+        <p:nvSpPr>
+          <p:cNvPr id="15" name="Text 13"/>
+          <p:cNvSpPr/>
+          <p:nvPr/>
+        </p:nvSpPr>
+        <p:spPr>
+          <a:xfrm>
+            <a:off x="634901" y="1957983"/>
+            <a:ext cx="5259425" cy="186630"/>
+          </a:xfrm>
+          <a:prstGeom prst="rect">
+            <a:avLst/>
+          </a:prstGeom>
+          <a:noFill/>
+          <a:ln/>
+        </p:spPr>
+        <p:txBody>
+          <a:bodyPr wrap="square" lIns="0" tIns="0" rIns="0" bIns="0" rtlCol="0" anchor="t"/>
+          <a:lstStyle/>
+          <a:p>
             <a:pPr algn="l" indent="0" marL="0">
               <a:lnSpc>
                 <a:spcPts val="1470"/>
@@ -15875,6 +15541,17 @@
               <a:buNone/>
             </a:pPr>
             <a:r>
+              <a:rPr lang="en-US" sz="1050" dirty="0">
+                <a:solidFill>
+                  <a:srgbClr val="5B6677"/>
+                </a:solidFill>
+                <a:latin typeface="Noto Sans SC" pitchFamily="34" charset="0"/>
+                <a:ea typeface="Noto Sans SC" pitchFamily="34" charset="-122"/>
+                <a:cs typeface="Noto Sans SC" pitchFamily="34" charset="-120"/>
+              </a:rPr>
+              <a:t>2. Class </a:t>
+            </a:r>
+            <a:r>
               <a:rPr lang="en-US" sz="1050" b="1" dirty="0">
                 <a:solidFill>
                   <a:srgbClr val="5B6677"/>
@@ -15883,8 +15560,44 @@
                 <a:ea typeface="Noto Sans SC" pitchFamily="34" charset="-122"/>
                 <a:cs typeface="Noto Sans SC" pitchFamily="34" charset="-120"/>
               </a:rPr>
-              <a:t>8 sport pictures</a:t>
-            </a:r>
+              <a:t>chorally calls out</a:t>
+            </a:r>
+            <a:r>
+              <a:rPr lang="en-US" sz="1050" dirty="0">
+                <a:solidFill>
+                  <a:srgbClr val="5B6677"/>
+                </a:solidFill>
+                <a:latin typeface="Noto Sans SC" pitchFamily="34" charset="0"/>
+                <a:ea typeface="Noto Sans SC" pitchFamily="34" charset="-122"/>
+                <a:cs typeface="Noto Sans SC" pitchFamily="34" charset="-120"/>
+              </a:rPr>
+              <a:t> the Chinese word.</a:t>
+            </a:r>
+            <a:endParaRPr lang="en-US" sz="1050" dirty="0"/>
+          </a:p>
+        </p:txBody>
+      </p:sp>
+      <p:sp>
+        <p:nvSpPr>
+          <p:cNvPr id="16" name="Text 14"/>
+          <p:cNvSpPr/>
+          <p:nvPr/>
+        </p:nvSpPr>
+        <p:spPr>
+          <a:xfrm>
+            <a:off x="634901" y="2208014"/>
+            <a:ext cx="5259425" cy="186630"/>
+          </a:xfrm>
+          <a:prstGeom prst="rect">
+            <a:avLst/>
+          </a:prstGeom>
+          <a:noFill/>
+          <a:ln/>
+        </p:spPr>
+        <p:txBody>
+          <a:bodyPr wrap="square" lIns="0" tIns="0" rIns="0" bIns="0" rtlCol="0" anchor="t"/>
+          <a:lstStyle/>
+          <a:p>
             <a:pPr algn="l" indent="0" marL="0">
               <a:lnSpc>
                 <a:spcPts val="1470"/>
@@ -15903,44 +15616,10 @@
                 <a:ea typeface="Noto Sans SC" pitchFamily="34" charset="-122"/>
                 <a:cs typeface="Noto Sans SC" pitchFamily="34" charset="-120"/>
               </a:rPr>
-              <a:t> in random order.</a:t>
-            </a:r>
-            <a:endParaRPr lang="en-US" sz="1050" dirty="0"/>
-          </a:p>
-        </p:txBody>
-      </p:sp>
-      <p:sp>
-        <p:nvSpPr>
-          <p:cNvPr id="15" name="Text 13"/>
-          <p:cNvSpPr/>
-          <p:nvPr/>
-        </p:nvSpPr>
-        <p:spPr>
-          <a:xfrm>
-            <a:off x="634901" y="1957983"/>
-            <a:ext cx="5259425" cy="186630"/>
-          </a:xfrm>
-          <a:prstGeom prst="rect">
-            <a:avLst/>
-          </a:prstGeom>
-          <a:noFill/>
-          <a:ln/>
-        </p:spPr>
-        <p:txBody>
-          <a:bodyPr wrap="square" lIns="0" tIns="0" rIns="0" bIns="0" rtlCol="0" anchor="t"/>
-          <a:lstStyle/>
-          <a:p>
-            <a:pPr algn="l" indent="0" marL="0">
-              <a:lnSpc>
-                <a:spcPts val="1470"/>
-              </a:lnSpc>
-              <a:spcAft>
-                <a:spcPts val="500"/>
-              </a:spcAft>
-              <a:buNone/>
-            </a:pPr>
-            <a:r>
-              <a:rPr lang="en-US" sz="1050" dirty="0">
+              <a:t>3. Then </a:t>
+            </a:r>
+            <a:r>
+              <a:rPr lang="en-US" sz="1050" b="1" dirty="0">
                 <a:solidFill>
                   <a:srgbClr val="5B6677"/>
                 </a:solidFill>
@@ -15948,122 +15627,8 @@
                 <a:ea typeface="Noto Sans SC" pitchFamily="34" charset="-122"/>
                 <a:cs typeface="Noto Sans SC" pitchFamily="34" charset="-120"/>
               </a:rPr>
-              <a:t>2. Class </a:t>
-            </a:r>
-            <a:pPr algn="l" indent="0" marL="0">
-              <a:lnSpc>
-                <a:spcPts val="1470"/>
-              </a:lnSpc>
-              <a:spcAft>
-                <a:spcPts val="500"/>
-              </a:spcAft>
-              <a:buNone/>
-            </a:pPr>
-            <a:r>
-              <a:rPr lang="en-US" sz="1050" b="1" dirty="0">
-                <a:solidFill>
-                  <a:srgbClr val="5B6677"/>
-                </a:solidFill>
-                <a:latin typeface="Noto Sans SC" pitchFamily="34" charset="0"/>
-                <a:ea typeface="Noto Sans SC" pitchFamily="34" charset="-122"/>
-                <a:cs typeface="Noto Sans SC" pitchFamily="34" charset="-120"/>
-              </a:rPr>
-              <a:t>chorally calls out</a:t>
-            </a:r>
-            <a:pPr algn="l" indent="0" marL="0">
-              <a:lnSpc>
-                <a:spcPts val="1470"/>
-              </a:lnSpc>
-              <a:spcAft>
-                <a:spcPts val="500"/>
-              </a:spcAft>
-              <a:buNone/>
-            </a:pPr>
-            <a:r>
-              <a:rPr lang="en-US" sz="1050" dirty="0">
-                <a:solidFill>
-                  <a:srgbClr val="5B6677"/>
-                </a:solidFill>
-                <a:latin typeface="Noto Sans SC" pitchFamily="34" charset="0"/>
-                <a:ea typeface="Noto Sans SC" pitchFamily="34" charset="-122"/>
-                <a:cs typeface="Noto Sans SC" pitchFamily="34" charset="-120"/>
-              </a:rPr>
-              <a:t> the Chinese word.</a:t>
-            </a:r>
-            <a:endParaRPr lang="en-US" sz="1050" dirty="0"/>
-          </a:p>
-        </p:txBody>
-      </p:sp>
-      <p:sp>
-        <p:nvSpPr>
-          <p:cNvPr id="16" name="Text 14"/>
-          <p:cNvSpPr/>
-          <p:nvPr/>
-        </p:nvSpPr>
-        <p:spPr>
-          <a:xfrm>
-            <a:off x="634901" y="2208014"/>
-            <a:ext cx="5259425" cy="186630"/>
-          </a:xfrm>
-          <a:prstGeom prst="rect">
-            <a:avLst/>
-          </a:prstGeom>
-          <a:noFill/>
-          <a:ln/>
-        </p:spPr>
-        <p:txBody>
-          <a:bodyPr wrap="square" lIns="0" tIns="0" rIns="0" bIns="0" rtlCol="0" anchor="t"/>
-          <a:lstStyle/>
-          <a:p>
-            <a:pPr algn="l" indent="0" marL="0">
-              <a:lnSpc>
-                <a:spcPts val="1470"/>
-              </a:lnSpc>
-              <a:spcAft>
-                <a:spcPts val="500"/>
-              </a:spcAft>
-              <a:buNone/>
-            </a:pPr>
-            <a:r>
-              <a:rPr lang="en-US" sz="1050" dirty="0">
-                <a:solidFill>
-                  <a:srgbClr val="5B6677"/>
-                </a:solidFill>
-                <a:latin typeface="Noto Sans SC" pitchFamily="34" charset="0"/>
-                <a:ea typeface="Noto Sans SC" pitchFamily="34" charset="-122"/>
-                <a:cs typeface="Noto Sans SC" pitchFamily="34" charset="-120"/>
-              </a:rPr>
-              <a:t>3. Then </a:t>
-            </a:r>
-            <a:pPr algn="l" indent="0" marL="0">
-              <a:lnSpc>
-                <a:spcPts val="1470"/>
-              </a:lnSpc>
-              <a:spcAft>
-                <a:spcPts val="500"/>
-              </a:spcAft>
-              <a:buNone/>
-            </a:pPr>
-            <a:r>
-              <a:rPr lang="en-US" sz="1050" b="1" dirty="0">
-                <a:solidFill>
-                  <a:srgbClr val="5B6677"/>
-                </a:solidFill>
-                <a:latin typeface="Noto Sans SC" pitchFamily="34" charset="0"/>
-                <a:ea typeface="Noto Sans SC" pitchFamily="34" charset="-122"/>
-                <a:cs typeface="Noto Sans SC" pitchFamily="34" charset="-120"/>
-              </a:rPr>
               <a:t>mimes the action</a:t>
             </a:r>
-            <a:pPr algn="l" indent="0" marL="0">
-              <a:lnSpc>
-                <a:spcPts val="1470"/>
-              </a:lnSpc>
-              <a:spcAft>
-                <a:spcPts val="500"/>
-              </a:spcAft>
-              <a:buNone/>
-            </a:pPr>
             <a:r>
               <a:rPr lang="en-US" sz="1050" dirty="0">
                 <a:solidFill>
@@ -17818,6 +17383,75 @@
               </a:rPr>
               <a:t>1. In pairs, complete </a:t>
             </a:r>
+            <a:r>
+              <a:rPr lang="en-US" sz="1050" b="1" dirty="0">
+                <a:solidFill>
+                  <a:srgbClr val="5B6677"/>
+                </a:solidFill>
+                <a:latin typeface="Noto Sans SC" pitchFamily="34" charset="0"/>
+                <a:ea typeface="Noto Sans SC" pitchFamily="34" charset="-122"/>
+                <a:cs typeface="Noto Sans SC" pitchFamily="34" charset="-120"/>
+              </a:rPr>
+              <a:t>4 sentence starters</a:t>
+            </a:r>
+            <a:r>
+              <a:rPr lang="en-US" sz="1050" dirty="0">
+                <a:solidFill>
+                  <a:srgbClr val="5B6677"/>
+                </a:solidFill>
+                <a:latin typeface="Noto Sans SC" pitchFamily="34" charset="0"/>
+                <a:ea typeface="Noto Sans SC" pitchFamily="34" charset="-122"/>
+                <a:cs typeface="Noto Sans SC" pitchFamily="34" charset="-120"/>
+              </a:rPr>
+              <a:t> using </a:t>
+            </a:r>
+            <a:r>
+              <a:rPr lang="en-US" sz="1050" b="1" dirty="0">
+                <a:solidFill>
+                  <a:srgbClr val="5B6677"/>
+                </a:solidFill>
+                <a:latin typeface="Noto Sans SC" pitchFamily="34" charset="0"/>
+                <a:ea typeface="Noto Sans SC" pitchFamily="34" charset="-122"/>
+                <a:cs typeface="Noto Sans SC" pitchFamily="34" charset="-120"/>
+              </a:rPr>
+              <a:t>跟(和)……一起</a:t>
+            </a:r>
+            <a:r>
+              <a:rPr lang="en-US" sz="1050" dirty="0">
+                <a:solidFill>
+                  <a:srgbClr val="5B6677"/>
+                </a:solidFill>
+                <a:latin typeface="Noto Sans SC" pitchFamily="34" charset="0"/>
+                <a:ea typeface="Noto Sans SC" pitchFamily="34" charset="-122"/>
+                <a:cs typeface="Noto Sans SC" pitchFamily="34" charset="-120"/>
+              </a:rPr>
+              <a:t>.</a:t>
+            </a:r>
+            <a:endParaRPr lang="en-US" sz="1050" dirty="0"/>
+          </a:p>
+        </p:txBody>
+      </p:sp>
+      <p:sp>
+        <p:nvSpPr>
+          <p:cNvPr id="14" name="Text 12"/>
+          <p:cNvSpPr/>
+          <p:nvPr/>
+        </p:nvSpPr>
+        <p:spPr>
+          <a:xfrm>
+            <a:off x="431750" y="1707207"/>
+            <a:ext cx="5944064" cy="186630"/>
+          </a:xfrm>
+          <a:prstGeom prst="rect">
+            <a:avLst/>
+          </a:prstGeom>
+          <a:noFill/>
+          <a:ln/>
+        </p:spPr>
+        <p:txBody>
+          <a:bodyPr wrap="square" lIns="0" tIns="0" rIns="0" bIns="0" rtlCol="0" anchor="t"/>
+          <a:lstStyle/>
+          <a:p>
             <a:pPr algn="l" indent="0" marL="0">
               <a:lnSpc>
                 <a:spcPts val="1470"/>
@@ -17828,6 +17462,17 @@
               <a:buNone/>
             </a:pPr>
             <a:r>
+              <a:rPr lang="en-US" sz="1050" dirty="0">
+                <a:solidFill>
+                  <a:srgbClr val="5B6677"/>
+                </a:solidFill>
+                <a:latin typeface="Noto Sans SC" pitchFamily="34" charset="0"/>
+                <a:ea typeface="Noto Sans SC" pitchFamily="34" charset="-122"/>
+                <a:cs typeface="Noto Sans SC" pitchFamily="34" charset="-120"/>
+              </a:rPr>
+              <a:t>2. Then write </a:t>
+            </a:r>
+            <a:r>
               <a:rPr lang="en-US" sz="1050" b="1" dirty="0">
                 <a:solidFill>
                   <a:srgbClr val="5B6677"/>
@@ -17836,142 +17481,8 @@
                 <a:ea typeface="Noto Sans SC" pitchFamily="34" charset="-122"/>
                 <a:cs typeface="Noto Sans SC" pitchFamily="34" charset="-120"/>
               </a:rPr>
-              <a:t>4 sentence starters</a:t>
-            </a:r>
-            <a:pPr algn="l" indent="0" marL="0">
-              <a:lnSpc>
-                <a:spcPts val="1470"/>
-              </a:lnSpc>
-              <a:spcAft>
-                <a:spcPts val="500"/>
-              </a:spcAft>
-              <a:buNone/>
-            </a:pPr>
-            <a:r>
-              <a:rPr lang="en-US" sz="1050" dirty="0">
-                <a:solidFill>
-                  <a:srgbClr val="5B6677"/>
-                </a:solidFill>
-                <a:latin typeface="Noto Sans SC" pitchFamily="34" charset="0"/>
-                <a:ea typeface="Noto Sans SC" pitchFamily="34" charset="-122"/>
-                <a:cs typeface="Noto Sans SC" pitchFamily="34" charset="-120"/>
-              </a:rPr>
-              <a:t> using </a:t>
-            </a:r>
-            <a:pPr algn="l" indent="0" marL="0">
-              <a:lnSpc>
-                <a:spcPts val="1470"/>
-              </a:lnSpc>
-              <a:spcAft>
-                <a:spcPts val="500"/>
-              </a:spcAft>
-              <a:buNone/>
-            </a:pPr>
-            <a:r>
-              <a:rPr lang="en-US" sz="1050" b="1" dirty="0">
-                <a:solidFill>
-                  <a:srgbClr val="5B6677"/>
-                </a:solidFill>
-                <a:latin typeface="Noto Sans SC" pitchFamily="34" charset="0"/>
-                <a:ea typeface="Noto Sans SC" pitchFamily="34" charset="-122"/>
-                <a:cs typeface="Noto Sans SC" pitchFamily="34" charset="-120"/>
-              </a:rPr>
-              <a:t>跟(和)……一起</a:t>
-            </a:r>
-            <a:pPr algn="l" indent="0" marL="0">
-              <a:lnSpc>
-                <a:spcPts val="1470"/>
-              </a:lnSpc>
-              <a:spcAft>
-                <a:spcPts val="500"/>
-              </a:spcAft>
-              <a:buNone/>
-            </a:pPr>
-            <a:r>
-              <a:rPr lang="en-US" sz="1050" dirty="0">
-                <a:solidFill>
-                  <a:srgbClr val="5B6677"/>
-                </a:solidFill>
-                <a:latin typeface="Noto Sans SC" pitchFamily="34" charset="0"/>
-                <a:ea typeface="Noto Sans SC" pitchFamily="34" charset="-122"/>
-                <a:cs typeface="Noto Sans SC" pitchFamily="34" charset="-120"/>
-              </a:rPr>
-              <a:t>.</a:t>
-            </a:r>
-            <a:endParaRPr lang="en-US" sz="1050" dirty="0"/>
-          </a:p>
-        </p:txBody>
-      </p:sp>
-      <p:sp>
-        <p:nvSpPr>
-          <p:cNvPr id="14" name="Text 12"/>
-          <p:cNvSpPr/>
-          <p:nvPr/>
-        </p:nvSpPr>
-        <p:spPr>
-          <a:xfrm>
-            <a:off x="431750" y="1707207"/>
-            <a:ext cx="5944064" cy="186630"/>
-          </a:xfrm>
-          <a:prstGeom prst="rect">
-            <a:avLst/>
-          </a:prstGeom>
-          <a:noFill/>
-          <a:ln/>
-        </p:spPr>
-        <p:txBody>
-          <a:bodyPr wrap="square" lIns="0" tIns="0" rIns="0" bIns="0" rtlCol="0" anchor="t"/>
-          <a:lstStyle/>
-          <a:p>
-            <a:pPr algn="l" indent="0" marL="0">
-              <a:lnSpc>
-                <a:spcPts val="1470"/>
-              </a:lnSpc>
-              <a:spcAft>
-                <a:spcPts val="500"/>
-              </a:spcAft>
-              <a:buNone/>
-            </a:pPr>
-            <a:r>
-              <a:rPr lang="en-US" sz="1050" dirty="0">
-                <a:solidFill>
-                  <a:srgbClr val="5B6677"/>
-                </a:solidFill>
-                <a:latin typeface="Noto Sans SC" pitchFamily="34" charset="0"/>
-                <a:ea typeface="Noto Sans SC" pitchFamily="34" charset="-122"/>
-                <a:cs typeface="Noto Sans SC" pitchFamily="34" charset="-120"/>
-              </a:rPr>
-              <a:t>2. Then write </a:t>
-            </a:r>
-            <a:pPr algn="l" indent="0" marL="0">
-              <a:lnSpc>
-                <a:spcPts val="1470"/>
-              </a:lnSpc>
-              <a:spcAft>
-                <a:spcPts val="500"/>
-              </a:spcAft>
-              <a:buNone/>
-            </a:pPr>
-            <a:r>
-              <a:rPr lang="en-US" sz="1050" b="1" dirty="0">
-                <a:solidFill>
-                  <a:srgbClr val="5B6677"/>
-                </a:solidFill>
-                <a:latin typeface="Noto Sans SC" pitchFamily="34" charset="0"/>
-                <a:ea typeface="Noto Sans SC" pitchFamily="34" charset="-122"/>
-                <a:cs typeface="Noto Sans SC" pitchFamily="34" charset="-120"/>
-              </a:rPr>
               <a:t>4 fully original sentences</a:t>
             </a:r>
-            <a:pPr algn="l" indent="0" marL="0">
-              <a:lnSpc>
-                <a:spcPts val="1470"/>
-              </a:lnSpc>
-              <a:spcAft>
-                <a:spcPts val="500"/>
-              </a:spcAft>
-              <a:buNone/>
-            </a:pPr>
             <a:r>
               <a:rPr lang="en-US" sz="1050" dirty="0">
                 <a:solidFill>
